--- a/marketing_science_case_study/Marketing_Science_Case_Study.pptx
+++ b/marketing_science_case_study/Marketing_Science_Case_Study.pptx
@@ -4431,7 +4431,7 @@
                           <a:ea typeface="Calibri" pitchFamily="34" charset="-122"/>
                           <a:cs typeface="Calibri" pitchFamily="34" charset="-120"/>
                         </a:rPr>
-                        <a:t>to hit a £18 true CPA</a:t>
+                        <a:t>to hit an £18 true CPA</a:t>
                       </a:r>
                       <a:endParaRPr lang="en-US" sz="980" dirty="0">
                         <a:latin typeface="Calibri" charset="0"/>
